--- a/apps/shell/resources/builtin-skills/cheil-proposal/assets/캠페인 제안서.pptx
+++ b/apps/shell/resources/builtin-skills/cheil-proposal/assets/캠페인 제안서.pptx
@@ -3192,7 +3192,7 @@
                 </a:solidFill>
                 <a:latin typeface="맑은 고딕"/>
               </a:rPr>
-              <a:t>[광고주명] 제안</a:t>
+              <a:t>[광고주] 제안</a:t>
             </a:r>
           </a:p>
           <a:p>
@@ -3204,7 +3204,7 @@
                 </a:solidFill>
                 <a:latin typeface="맑은 고딕"/>
               </a:rPr>
-              <a:t>[제출일]  ·  [팀명]</a:t>
+              <a:t>[작성일]  ·  [팀명]</a:t>
             </a:r>
           </a:p>
         </p:txBody>
@@ -3699,7 +3699,17 @@
                   <a:txBody>
                     <a:bodyPr/>
                     <a:lstStyle/>
-                    <a:p/>
+                    <a:p>
+                      <a:r>
+                        <a:rPr sz="1300" b="0">
+                          <a:solidFill>
+                            <a:srgbClr val="1A1A1A"/>
+                          </a:solidFill>
+                          <a:latin typeface="맑은 고딕"/>
+                        </a:rPr>
+                        <a:t>[캠페인 기간]</a:t>
+                      </a:r>
+                    </a:p>
                   </a:txBody>
                   <a:tcPr>
                     <a:solidFill>
@@ -3719,7 +3729,7 @@
                           </a:solidFill>
                           <a:latin typeface="맑은 고딕"/>
                         </a:rPr>
-                        <a:t>[예산 합계]</a:t>
+                        <a:t>[총예산]</a:t>
                       </a:r>
                     </a:p>
                   </a:txBody>
@@ -4627,6 +4637,18 @@
                 </a:solidFill>
                 <a:latin typeface="맑은 고딕"/>
               </a:rPr>
+              <a:t>목표 KPI: [KPI]</a:t>
+            </a:r>
+          </a:p>
+          <a:p>
+            <a:pPr/>
+            <a:r>
+              <a:rPr sz="1800" b="0">
+                <a:solidFill>
+                  <a:srgbClr val="1A1A1A"/>
+                </a:solidFill>
+                <a:latin typeface="맑은 고딕"/>
+              </a:rPr>
               <a:t>근거: [RFP·브리프의 해당 문장]</a:t>
             </a:r>
           </a:p>
@@ -4877,7 +4899,7 @@
                 </a:solidFill>
                 <a:latin typeface="맑은 고딕"/>
               </a:rPr>
-              <a:t>핵심 타깃: [누구 — 나이·생활·구매 맥락]</a:t>
+              <a:t>핵심 타깃: [타깃]</a:t>
             </a:r>
           </a:p>
           <a:p>

--- a/apps/shell/resources/builtin-skills/cheil-proposal/assets/캠페인 제안서.pptx
+++ b/apps/shell/resources/builtin-skills/cheil-proposal/assets/캠페인 제안서.pptx
@@ -3237,13 +3237,19 @@
             <p:ph type="title"/>
           </p:nvPr>
         </p:nvSpPr>
-        <p:spPr/>
-        <p:txBody>
-          <a:bodyPr/>
-          <a:lstStyle/>
-          <a:p>
-            <a:r>
-              <a:rPr sz="2800" b="1">
+        <p:spPr>
+          <a:xfrm>
+            <a:off x="457200" y="560000"/>
+            <a:ext cx="11277600" cy="800000"/>
+          </a:xfrm>
+        </p:spPr>
+        <p:txBody>
+          <a:bodyPr/>
+          <a:lstStyle/>
+          <a:p>
+            <a:pPr algn="l"/>
+            <a:r>
+              <a:rPr sz="2400" b="1">
                 <a:solidFill>
                   <a:srgbClr val="1A1A1A"/>
                 </a:solidFill>
@@ -3818,13 +3824,19 @@
             <p:ph type="title"/>
           </p:nvPr>
         </p:nvSpPr>
-        <p:spPr/>
-        <p:txBody>
-          <a:bodyPr/>
-          <a:lstStyle/>
-          <a:p>
-            <a:r>
-              <a:rPr sz="2800" b="1">
+        <p:spPr>
+          <a:xfrm>
+            <a:off x="457200" y="560000"/>
+            <a:ext cx="11277600" cy="800000"/>
+          </a:xfrm>
+        </p:spPr>
+        <p:txBody>
+          <a:bodyPr/>
+          <a:lstStyle/>
+          <a:p>
+            <a:pPr algn="l"/>
+            <a:r>
+              <a:rPr sz="2400" b="1">
                 <a:solidFill>
                   <a:srgbClr val="1A1A1A"/>
                 </a:solidFill>
@@ -4370,13 +4382,19 @@
             <p:ph type="title"/>
           </p:nvPr>
         </p:nvSpPr>
-        <p:spPr/>
-        <p:txBody>
-          <a:bodyPr/>
-          <a:lstStyle/>
-          <a:p>
-            <a:r>
-              <a:rPr sz="2800" b="1">
+        <p:spPr>
+          <a:xfrm>
+            <a:off x="457200" y="560000"/>
+            <a:ext cx="11277600" cy="800000"/>
+          </a:xfrm>
+        </p:spPr>
+        <p:txBody>
+          <a:bodyPr/>
+          <a:lstStyle/>
+          <a:p>
+            <a:pPr algn="l"/>
+            <a:r>
+              <a:rPr sz="2400" b="1">
                 <a:solidFill>
                   <a:srgbClr val="1A1A1A"/>
                 </a:solidFill>
@@ -4397,7 +4415,12 @@
             <p:ph idx="1"/>
           </p:nvPr>
         </p:nvSpPr>
-        <p:spPr/>
+        <p:spPr>
+          <a:xfrm>
+            <a:off x="457200" y="1650000"/>
+            <a:ext cx="11277600" cy="4500000"/>
+          </a:xfrm>
+        </p:spPr>
         <p:txBody>
           <a:bodyPr/>
           <a:lstStyle/>
@@ -4573,13 +4596,19 @@
             <p:ph type="title"/>
           </p:nvPr>
         </p:nvSpPr>
-        <p:spPr/>
-        <p:txBody>
-          <a:bodyPr/>
-          <a:lstStyle/>
-          <a:p>
-            <a:r>
-              <a:rPr sz="2800" b="1">
+        <p:spPr>
+          <a:xfrm>
+            <a:off x="457200" y="560000"/>
+            <a:ext cx="11277600" cy="800000"/>
+          </a:xfrm>
+        </p:spPr>
+        <p:txBody>
+          <a:bodyPr/>
+          <a:lstStyle/>
+          <a:p>
+            <a:pPr algn="l"/>
+            <a:r>
+              <a:rPr sz="2400" b="1">
                 <a:solidFill>
                   <a:srgbClr val="1A1A1A"/>
                 </a:solidFill>
@@ -4600,7 +4629,12 @@
             <p:ph idx="1"/>
           </p:nvPr>
         </p:nvSpPr>
-        <p:spPr/>
+        <p:spPr>
+          <a:xfrm>
+            <a:off x="457200" y="1650000"/>
+            <a:ext cx="11277600" cy="4500000"/>
+          </a:xfrm>
+        </p:spPr>
         <p:txBody>
           <a:bodyPr/>
           <a:lstStyle/>
@@ -4716,13 +4750,19 @@
             <p:ph type="title"/>
           </p:nvPr>
         </p:nvSpPr>
-        <p:spPr/>
-        <p:txBody>
-          <a:bodyPr/>
-          <a:lstStyle/>
-          <a:p>
-            <a:r>
-              <a:rPr sz="2800" b="1">
+        <p:spPr>
+          <a:xfrm>
+            <a:off x="457200" y="560000"/>
+            <a:ext cx="11277600" cy="800000"/>
+          </a:xfrm>
+        </p:spPr>
+        <p:txBody>
+          <a:bodyPr/>
+          <a:lstStyle/>
+          <a:p>
+            <a:pPr algn="l"/>
+            <a:r>
+              <a:rPr sz="2400" b="1">
                 <a:solidFill>
                   <a:srgbClr val="1A1A1A"/>
                 </a:solidFill>
@@ -4743,7 +4783,12 @@
             <p:ph idx="1"/>
           </p:nvPr>
         </p:nvSpPr>
-        <p:spPr/>
+        <p:spPr>
+          <a:xfrm>
+            <a:off x="457200" y="1650000"/>
+            <a:ext cx="11277600" cy="4500000"/>
+          </a:xfrm>
+        </p:spPr>
         <p:txBody>
           <a:bodyPr/>
           <a:lstStyle/>
@@ -4859,13 +4904,19 @@
             <p:ph type="title"/>
           </p:nvPr>
         </p:nvSpPr>
-        <p:spPr/>
-        <p:txBody>
-          <a:bodyPr/>
-          <a:lstStyle/>
-          <a:p>
-            <a:r>
-              <a:rPr sz="2800" b="1">
+        <p:spPr>
+          <a:xfrm>
+            <a:off x="457200" y="560000"/>
+            <a:ext cx="11277600" cy="800000"/>
+          </a:xfrm>
+        </p:spPr>
+        <p:txBody>
+          <a:bodyPr/>
+          <a:lstStyle/>
+          <a:p>
+            <a:pPr algn="l"/>
+            <a:r>
+              <a:rPr sz="2400" b="1">
                 <a:solidFill>
                   <a:srgbClr val="1A1A1A"/>
                 </a:solidFill>
@@ -4886,7 +4937,12 @@
             <p:ph idx="1"/>
           </p:nvPr>
         </p:nvSpPr>
-        <p:spPr/>
+        <p:spPr>
+          <a:xfrm>
+            <a:off x="457200" y="1650000"/>
+            <a:ext cx="11277600" cy="4500000"/>
+          </a:xfrm>
+        </p:spPr>
         <p:txBody>
           <a:bodyPr/>
           <a:lstStyle/>
@@ -4990,13 +5046,19 @@
             <p:ph type="title"/>
           </p:nvPr>
         </p:nvSpPr>
-        <p:spPr/>
-        <p:txBody>
-          <a:bodyPr/>
-          <a:lstStyle/>
-          <a:p>
-            <a:r>
-              <a:rPr sz="2800" b="1">
+        <p:spPr>
+          <a:xfrm>
+            <a:off x="457200" y="560000"/>
+            <a:ext cx="11277600" cy="800000"/>
+          </a:xfrm>
+        </p:spPr>
+        <p:txBody>
+          <a:bodyPr/>
+          <a:lstStyle/>
+          <a:p>
+            <a:pPr algn="l"/>
+            <a:r>
+              <a:rPr sz="2400" b="1">
                 <a:solidFill>
                   <a:srgbClr val="1A1A1A"/>
                 </a:solidFill>
@@ -5017,7 +5079,12 @@
             <p:ph idx="1"/>
           </p:nvPr>
         </p:nvSpPr>
-        <p:spPr/>
+        <p:spPr>
+          <a:xfrm>
+            <a:off x="457200" y="1650000"/>
+            <a:ext cx="11277600" cy="4500000"/>
+          </a:xfrm>
+        </p:spPr>
         <p:txBody>
           <a:bodyPr/>
           <a:lstStyle/>
@@ -5133,13 +5200,19 @@
             <p:ph type="title"/>
           </p:nvPr>
         </p:nvSpPr>
-        <p:spPr/>
-        <p:txBody>
-          <a:bodyPr/>
-          <a:lstStyle/>
-          <a:p>
-            <a:r>
-              <a:rPr sz="2800" b="1">
+        <p:spPr>
+          <a:xfrm>
+            <a:off x="457200" y="560000"/>
+            <a:ext cx="11277600" cy="800000"/>
+          </a:xfrm>
+        </p:spPr>
+        <p:txBody>
+          <a:bodyPr/>
+          <a:lstStyle/>
+          <a:p>
+            <a:pPr algn="l"/>
+            <a:r>
+              <a:rPr sz="2400" b="1">
                 <a:solidFill>
                   <a:srgbClr val="1A1A1A"/>
                 </a:solidFill>
@@ -5160,7 +5233,12 @@
             <p:ph idx="1"/>
           </p:nvPr>
         </p:nvSpPr>
-        <p:spPr/>
+        <p:spPr>
+          <a:xfrm>
+            <a:off x="457200" y="1650000"/>
+            <a:ext cx="11277600" cy="4500000"/>
+          </a:xfrm>
+        </p:spPr>
         <p:txBody>
           <a:bodyPr/>
           <a:lstStyle/>
@@ -5252,13 +5330,19 @@
             <p:ph type="title"/>
           </p:nvPr>
         </p:nvSpPr>
-        <p:spPr/>
-        <p:txBody>
-          <a:bodyPr/>
-          <a:lstStyle/>
-          <a:p>
-            <a:r>
-              <a:rPr sz="2800" b="1">
+        <p:spPr>
+          <a:xfrm>
+            <a:off x="457200" y="560000"/>
+            <a:ext cx="11277600" cy="800000"/>
+          </a:xfrm>
+        </p:spPr>
+        <p:txBody>
+          <a:bodyPr/>
+          <a:lstStyle/>
+          <a:p>
+            <a:pPr algn="l"/>
+            <a:r>
+              <a:rPr sz="2400" b="1">
                 <a:solidFill>
                   <a:srgbClr val="1A1A1A"/>
                 </a:solidFill>
@@ -5279,7 +5363,12 @@
             <p:ph idx="1"/>
           </p:nvPr>
         </p:nvSpPr>
-        <p:spPr/>
+        <p:spPr>
+          <a:xfrm>
+            <a:off x="457200" y="1650000"/>
+            <a:ext cx="11277600" cy="4500000"/>
+          </a:xfrm>
+        </p:spPr>
         <p:txBody>
           <a:bodyPr/>
           <a:lstStyle/>
@@ -5383,13 +5472,19 @@
             <p:ph type="title"/>
           </p:nvPr>
         </p:nvSpPr>
-        <p:spPr/>
-        <p:txBody>
-          <a:bodyPr/>
-          <a:lstStyle/>
-          <a:p>
-            <a:r>
-              <a:rPr sz="2800" b="1">
+        <p:spPr>
+          <a:xfrm>
+            <a:off x="457200" y="560000"/>
+            <a:ext cx="11277600" cy="800000"/>
+          </a:xfrm>
+        </p:spPr>
+        <p:txBody>
+          <a:bodyPr/>
+          <a:lstStyle/>
+          <a:p>
+            <a:pPr algn="l"/>
+            <a:r>
+              <a:rPr sz="2400" b="1">
                 <a:solidFill>
                   <a:srgbClr val="1A1A1A"/>
                 </a:solidFill>
